--- a/docs/slides/pptx/M3-deciding.pptx
+++ b/docs/slides/pptx/M3-deciding.pptx
@@ -685,7 +685,7 @@
           <a:lstStyle/>
           <a:p>
             <a:r>
-              <a:t>The first two modules produced answers for a user. This one produces decisions for the people running the product — a ranger, an ops lead, a support manager.</a:t>
+              <a:t>The first two modules produced answers for a user. This one produces decisions for the people running the product: a ranger, an ops lead, a support manager.</a:t>
             </a:r>
           </a:p>
         </p:txBody>
@@ -825,12 +825,12 @@
           <a:lstStyle/>
           <a:p>
             <a:r>
-              <a:t>The user problem, spoken, 60 seconds: every message to Trailhead lands in one inbox — permits, conditions, complaints, lost-and-found, and occasionally an actual emergency. A ranger triages by hand once or twice a day; the permit waits behind the granola questions, and the emergency sits unread for four hours. The user's real problem: their message goes into a hole.</a:t>
-            </a:r>
-          </a:p>
-          <a:p>
-            <a:r>
-              <a:t>No concept slide: it's classification again (03 was the warm-up), now with consequences. Zero-shot, taxonomy as plain-language descriptions, and the demo shows the whole thing — including fixing a misroute by editing a sentence, not the model.</a:t>
+              <a:t>The user problem, spoken, 60 seconds: every message to Trailhead lands in one inbox: permits, conditions, complaints, lost-and-found, and occasionally an actual emergency. A ranger triages by hand once or twice a day; the permit waits behind the granola questions, and the emergency sits unread for four hours. The user's real problem: their message goes into a hole.</a:t>
+            </a:r>
+          </a:p>
+          <a:p>
+            <a:r>
+              <a:t>No concept slide: it's classification again (03 was the warm-up), now with consequences. Zero-shot, taxonomy as plain-language descriptions, and the demo shows the whole thing, including fixing a misroute by editing a sentence, not the model.</a:t>
             </a:r>
           </a:p>
         </p:txBody>
@@ -1150,7 +1150,7 @@
             </a:r>
             <a:r>
               <a:rPr dirty="0"/>
-              <a:t>, not the code. </a:t>
+              <a:t>, not the code: add "and asking whether an activity such as commercial photography needs a special use permit" to the end of the permit line. </a:t>
             </a:r>
             <a:r>
               <a:rPr dirty="0">
@@ -1160,7 +1160,7 @@
             </a:r>
             <a:r>
               <a:rPr dirty="0"/>
-              <a:t> again.</a:t>
+              <a:t> again: inq-0030 moves to permit, 18/20.</a:t>
             </a:r>
           </a:p>
           <a:p>
@@ -1478,7 +1478,7 @@
           <a:lstStyle/>
           <a:p>
             <a:r>
-              <a:t>The user problem, spoken, 60 seconds: about 500 trail-condition reports a season across 200 trails, and almost all of them say "muddy in spots, otherwise fine." Then in one week three hikers report a washed-out bridge on the same trail and a fourth mentions aggressive bear activity two trails over — and nobody notices. The park hears about the bridge from a one-star review a month later.</a:t>
+              <a:t>The user problem, spoken, 60 seconds: about 500 trail-condition reports a season across 200 trails, and almost all of them say "muddy in spots, otherwise fine." Then in one week three hikers report a washed-out bridge on the same trail and a fourth mentions aggressive bear activity two trails over, and nobody notices. The park hears about the bridge from a one-star review a month later.</a:t>
             </a:r>
           </a:p>
         </p:txBody>
@@ -2873,7 +2873,7 @@
           </a:p>
           <a:p>
             <a:r>
-              <a:t>The demo opens with the failure that makes the point: asked to draft a reply to a woman whose husband is four hours overdue, the model writes a warm, reassuring, useless note — every run, even with the escalation instruction moved to the top, where it announces ESCALATE and then writes the note anyway. More prompt engineering is not the lesson; the policy lives in code.</a:t>
+              <a:t>The demo opens with the failure that makes the point: asked to draft a reply to a woman whose husband is four hours overdue, the model writes a warm, reassuring, useless note, every run, even with the escalation instruction moved to the top, where it announces ESCALATE and then writes the note anyway. More prompt engineering is not the lesson; the policy lives in code.</a:t>
             </a:r>
           </a:p>
         </p:txBody>
@@ -4069,7 +4069,7 @@
           </a:p>
           <a:p>
             <a:r>
-              <a:t>Then choose by energy as much as by interest: 08 lets you go straight to the math; 09 is mostly a decision about what your software may do unsupervised — running out of gas? Take this. It is also the one most likely to matter back at work.</a:t>
+              <a:t>Then choose by energy as much as by interest: 08 lets you go straight to the math; 09 is mostly a decision about what your software may do unsupervised. Running out of gas? Take this. It is also the one most likely to matter back at work.</a:t>
             </a:r>
           </a:p>
         </p:txBody>
@@ -4144,7 +4144,7 @@
           </a:p>
           <a:p>
             <a:r>
-              <a:t>Prompts if quiet: whose classifier caught both emergencies? Whose model wrote the reassuring note? Rows 7–9 of the framework are done. Break, then Module 4 — everyone does it.</a:t>
+              <a:t>Prompts if quiet: whose classifier caught both emergencies? Whose model wrote the reassuring note? Rows 7-9 of the framework are done. Break, then Module 4, and everyone does it.</a:t>
             </a:r>
           </a:p>
         </p:txBody>
@@ -8396,7 +8396,7 @@
           <a:p>
             <a:r>
               <a:rPr sz="2800"/>
-              <a:t>08 never asks the model to decide — only for numbers</a:t>
+              <a:t>08 never asks the model to decide, only for numbers</a:t>
             </a:r>
           </a:p>
           <a:p>
@@ -19591,7 +19591,7 @@
           <a:p>
             <a:r>
               <a:rPr sz="2800"/>
-              <a:t>The policy table — point at the emergency row</a:t>
+              <a:t>The policy table: point at the emergency row</a:t>
             </a:r>
           </a:p>
         </p:txBody>
@@ -20132,85 +20132,56 @@
           <a:bodyPr wrap="square"/>
           <a:lstStyle/>
           <a:p>
-            <a:r>
-              <a:rPr sz="3600"/>
+            <a:pPr marL="0" indent="0">
+              <a:buNone/>
+            </a:pPr>
+            <a:r>
+              <a:rPr sz="3600" dirty="0"/>
               <a:t>⭐ Recommended: </a:t>
             </a:r>
-            <a:r>
-              <a:rPr sz="3600" b="1"/>
+            <a:endParaRPr lang="en-US" sz="3600" dirty="0"/>
+          </a:p>
+          <a:p>
+            <a:pPr marL="0" indent="0">
+              <a:buNone/>
+            </a:pPr>
+            <a:r>
+              <a:rPr sz="3600" b="1" dirty="0"/>
               <a:t>F07 Classification &amp; Routing</a:t>
             </a:r>
-          </a:p>
-          <a:p>
-            <a:r>
-              <a:rPr sz="3600"/>
+            <a:endParaRPr lang="en-US" sz="3600" b="1" dirty="0"/>
+          </a:p>
+          <a:p>
+            <a:pPr marL="0" indent="0">
+              <a:buNone/>
+            </a:pPr>
+            <a:endParaRPr sz="3600" b="1" dirty="0"/>
+          </a:p>
+          <a:p>
+            <a:pPr marL="0" indent="0">
+              <a:buNone/>
+            </a:pPr>
+            <a:r>
+              <a:rPr sz="3600" dirty="0"/>
               <a:t>⛰️ Challenge: </a:t>
             </a:r>
-            <a:r>
-              <a:rPr sz="3600" b="1"/>
+            <a:endParaRPr lang="en-US" sz="3600" dirty="0"/>
+          </a:p>
+          <a:p>
+            <a:pPr marL="0" indent="0">
+              <a:buNone/>
+            </a:pPr>
+            <a:r>
+              <a:rPr sz="3600" b="1" dirty="0"/>
               <a:t>F08 Anomaly Detection</a:t>
             </a:r>
             <a:r>
-              <a:rPr sz="3600"/>
+              <a:rPr sz="3600" dirty="0"/>
               <a:t> · </a:t>
             </a:r>
             <a:r>
-              <a:rPr sz="3600" b="1"/>
+              <a:rPr sz="3600" b="1" dirty="0"/>
               <a:t>F09 Human-in-the-Loop</a:t>
-            </a:r>
-          </a:p>
-          <a:p>
-            <a:r>
-              <a:rPr sz="2800">
-                <a:latin typeface="Consolas"/>
-              </a:rPr>
-              <a:t>FNN-lab.md</a:t>
-            </a:r>
-            <a:r>
-              <a:rPr sz="2800"/>
-              <a:t> · </a:t>
-            </a:r>
-            <a:r>
-              <a:rPr sz="2800">
-                <a:latin typeface="Consolas"/>
-              </a:rPr>
-              <a:t>http/ollama.http</a:t>
-            </a:r>
-            <a:r>
-              <a:rPr sz="2800"/>
-              <a:t> · </a:t>
-            </a:r>
-            <a:r>
-              <a:rPr sz="2800">
-                <a:latin typeface="Consolas"/>
-              </a:rPr>
-              <a:t>expected-output.md</a:t>
-            </a:r>
-            <a:r>
-              <a:rPr sz="2800"/>
-              <a:t> · </a:t>
-            </a:r>
-            <a:r>
-              <a:rPr sz="2800">
-                <a:latin typeface="Consolas"/>
-              </a:rPr>
-              <a:t>data/</a:t>
-            </a:r>
-          </a:p>
-          <a:p>
-            <a:endParaRPr sz="2800">
-              <a:latin typeface="Consolas"/>
-            </a:endParaRPr>
-          </a:p>
-          <a:p>
-            <a:endParaRPr sz="2800">
-              <a:latin typeface="Consolas"/>
-            </a:endParaRPr>
-          </a:p>
-          <a:p>
-            <a:r>
-              <a:rPr sz="3200"/>
-              <a:t>✅ Done = 2/2 emergencies caught — 19/20 with a miss is a fail</a:t>
             </a:r>
           </a:p>
         </p:txBody>
@@ -23899,7 +23870,7 @@
           <a:p>
             <a:r>
               <a:rPr sz="2800"/>
-              <a:t>08 never asks the model to decide — only for numbers</a:t>
+              <a:t>08 never asks the model to decide, only for numbers</a:t>
             </a:r>
           </a:p>
         </p:txBody>
